--- a/Semana 5/20250915_07_Cronograma de alto nivel - Hitos (1).pptx
+++ b/Semana 5/20250915_07_Cronograma de alto nivel - Hitos (1).pptx
@@ -1,6 +1,6 @@
 
 <file path=ppt/presentation.xml><?xml version="1.0" encoding="utf-8"?>
-<p:presentation xmlns:a="http://schemas.openxmlformats.org/drawingml/2006/main" xmlns:r="http://schemas.openxmlformats.org/officeDocument/2006/relationships" xmlns:p="http://schemas.openxmlformats.org/presentationml/2006/main" removePersonalInfoOnSave="1" saveSubsetFonts="1">
+<p:presentation xmlns:a="http://schemas.openxmlformats.org/drawingml/2006/main" xmlns:r="http://schemas.openxmlformats.org/officeDocument/2006/relationships" xmlns:p="http://schemas.openxmlformats.org/presentationml/2006/main" saveSubsetFonts="1">
   <p:sldMasterIdLst>
     <p:sldMasterId id="2147483660" r:id="rId5"/>
   </p:sldMasterIdLst>
@@ -254,7 +254,7 @@
           <a:p>
             <a:fld id="{C5164158-0CE9-4349-B3F5-2F2E57F0D0CB}" type="datetimeFigureOut">
               <a:rPr lang="en-US" smtClean="0"/>
-              <a:t>9/30/2025</a:t>
+              <a:t>10/6/2025</a:t>
             </a:fld>
             <a:endParaRPr lang="en-US"/>
           </a:p>
@@ -424,7 +424,7 @@
           <a:p>
             <a:fld id="{C5164158-0CE9-4349-B3F5-2F2E57F0D0CB}" type="datetimeFigureOut">
               <a:rPr lang="en-US" smtClean="0"/>
-              <a:t>9/30/2025</a:t>
+              <a:t>10/6/2025</a:t>
             </a:fld>
             <a:endParaRPr lang="en-US"/>
           </a:p>
@@ -604,7 +604,7 @@
           <a:p>
             <a:fld id="{C5164158-0CE9-4349-B3F5-2F2E57F0D0CB}" type="datetimeFigureOut">
               <a:rPr lang="en-US" smtClean="0"/>
-              <a:t>9/30/2025</a:t>
+              <a:t>10/6/2025</a:t>
             </a:fld>
             <a:endParaRPr lang="en-US"/>
           </a:p>
@@ -774,7 +774,7 @@
           <a:p>
             <a:fld id="{C5164158-0CE9-4349-B3F5-2F2E57F0D0CB}" type="datetimeFigureOut">
               <a:rPr lang="en-US" smtClean="0"/>
-              <a:t>9/30/2025</a:t>
+              <a:t>10/6/2025</a:t>
             </a:fld>
             <a:endParaRPr lang="en-US"/>
           </a:p>
@@ -1018,7 +1018,7 @@
           <a:p>
             <a:fld id="{C5164158-0CE9-4349-B3F5-2F2E57F0D0CB}" type="datetimeFigureOut">
               <a:rPr lang="en-US" smtClean="0"/>
-              <a:t>9/30/2025</a:t>
+              <a:t>10/6/2025</a:t>
             </a:fld>
             <a:endParaRPr lang="en-US"/>
           </a:p>
@@ -1250,7 +1250,7 @@
           <a:p>
             <a:fld id="{C5164158-0CE9-4349-B3F5-2F2E57F0D0CB}" type="datetimeFigureOut">
               <a:rPr lang="en-US" smtClean="0"/>
-              <a:t>9/30/2025</a:t>
+              <a:t>10/6/2025</a:t>
             </a:fld>
             <a:endParaRPr lang="en-US"/>
           </a:p>
@@ -1617,7 +1617,7 @@
           <a:p>
             <a:fld id="{C5164158-0CE9-4349-B3F5-2F2E57F0D0CB}" type="datetimeFigureOut">
               <a:rPr lang="en-US" smtClean="0"/>
-              <a:t>9/30/2025</a:t>
+              <a:t>10/6/2025</a:t>
             </a:fld>
             <a:endParaRPr lang="en-US"/>
           </a:p>
@@ -1735,7 +1735,7 @@
           <a:p>
             <a:fld id="{C5164158-0CE9-4349-B3F5-2F2E57F0D0CB}" type="datetimeFigureOut">
               <a:rPr lang="en-US" smtClean="0"/>
-              <a:t>9/30/2025</a:t>
+              <a:t>10/6/2025</a:t>
             </a:fld>
             <a:endParaRPr lang="en-US"/>
           </a:p>
@@ -1830,7 +1830,7 @@
           <a:p>
             <a:fld id="{C5164158-0CE9-4349-B3F5-2F2E57F0D0CB}" type="datetimeFigureOut">
               <a:rPr lang="en-US" smtClean="0"/>
-              <a:t>9/30/2025</a:t>
+              <a:t>10/6/2025</a:t>
             </a:fld>
             <a:endParaRPr lang="en-US"/>
           </a:p>
@@ -2107,7 +2107,7 @@
           <a:p>
             <a:fld id="{C5164158-0CE9-4349-B3F5-2F2E57F0D0CB}" type="datetimeFigureOut">
               <a:rPr lang="en-US" smtClean="0"/>
-              <a:t>9/30/2025</a:t>
+              <a:t>10/6/2025</a:t>
             </a:fld>
             <a:endParaRPr lang="en-US"/>
           </a:p>
@@ -2364,7 +2364,7 @@
           <a:p>
             <a:fld id="{C5164158-0CE9-4349-B3F5-2F2E57F0D0CB}" type="datetimeFigureOut">
               <a:rPr lang="en-US" smtClean="0"/>
-              <a:t>9/30/2025</a:t>
+              <a:t>10/6/2025</a:t>
             </a:fld>
             <a:endParaRPr lang="en-US"/>
           </a:p>
@@ -2641,7 +2641,7 @@
           <a:p>
             <a:fld id="{C5164158-0CE9-4349-B3F5-2F2E57F0D0CB}" type="datetimeFigureOut">
               <a:rPr lang="en-US" smtClean="0"/>
-              <a:t>9/30/2025</a:t>
+              <a:t>10/6/2025</a:t>
             </a:fld>
             <a:endParaRPr lang="en-US"/>
           </a:p>
@@ -3962,7 +3962,7 @@
           <a:lstStyle/>
           <a:p>
             <a:r>
-              <a:rPr lang="en-US" sz="1200">
+              <a:rPr lang="en-US" sz="1200" dirty="0">
                 <a:solidFill>
                   <a:schemeClr val="bg1"/>
                 </a:solidFill>
@@ -4294,7 +4294,7 @@
           <a:lstStyle/>
           <a:p>
             <a:r>
-              <a:rPr lang="en-US" sz="1200">
+              <a:rPr lang="en-US" sz="1200" dirty="0">
                 <a:solidFill>
                   <a:schemeClr val="bg1"/>
                 </a:solidFill>
@@ -4543,7 +4543,7 @@
           <a:lstStyle/>
           <a:p>
             <a:r>
-              <a:rPr lang="en-US" sz="1200">
+              <a:rPr lang="en-US" sz="1200" dirty="0">
                 <a:solidFill>
                   <a:schemeClr val="bg1"/>
                 </a:solidFill>
@@ -4935,9 +4935,9 @@
           </p:nvPr>
         </p:nvSpPr>
         <p:spPr>
-          <a:xfrm>
-            <a:off x="1188720" y="2854960"/>
-            <a:ext cx="2399089" cy="63500"/>
+          <a:xfrm flipH="1">
+            <a:off x="5931106" y="2918460"/>
+            <a:ext cx="555858" cy="45719"/>
           </a:xfrm>
           <a:prstGeom prst="rect">
             <a:avLst/>
@@ -5013,7 +5013,7 @@
         </p:nvSpPr>
         <p:spPr>
           <a:xfrm>
-            <a:off x="3516689" y="2905760"/>
+            <a:off x="6411418" y="2966561"/>
             <a:ext cx="127000" cy="139700"/>
           </a:xfrm>
           <a:prstGeom prst="triangle">
@@ -5079,7 +5079,7 @@
         </p:nvSpPr>
         <p:spPr>
           <a:xfrm>
-            <a:off x="3398504" y="3077210"/>
+            <a:off x="6293234" y="3089863"/>
             <a:ext cx="363369" cy="184666"/>
           </a:xfrm>
           <a:prstGeom prst="rect">
@@ -5094,7 +5094,7 @@
           <a:lstStyle/>
           <a:p>
             <a:r>
-              <a:rPr lang="en-US" sz="1200"/>
+              <a:rPr lang="en-US" sz="1200" dirty="0"/>
               <a:t>Today</a:t>
             </a:r>
           </a:p>
@@ -5228,7 +5228,7 @@
         </p:nvSpPr>
         <p:spPr>
           <a:xfrm>
-            <a:off x="6153974" y="2465991"/>
+            <a:off x="7387357" y="2409716"/>
             <a:ext cx="228600" cy="254000"/>
           </a:xfrm>
           <a:prstGeom prst="diamond">
@@ -5307,7 +5307,7 @@
         </p:nvSpPr>
         <p:spPr>
           <a:xfrm>
-            <a:off x="6250336" y="2016151"/>
+            <a:off x="6249736" y="2004330"/>
             <a:ext cx="703263" cy="138821"/>
           </a:xfrm>
           <a:prstGeom prst="rect">
@@ -5328,15 +5328,15 @@
             </a:pPr>
             <a:r>
               <a:rPr lang="en-US" sz="1100" dirty="0"/>
-              <a:t>Milestone 2</a:t>
-            </a:r>
-          </a:p>
-        </p:txBody>
-      </p:sp>
-      <p:sp>
-        <p:nvSpPr>
-          <p:cNvPr id="5015" name="TextBox 5014"/>
-          <p:cNvSpPr txBox="1"/>
+              <a:t>Hito 1</a:t>
+            </a:r>
+          </a:p>
+        </p:txBody>
+      </p:sp>
+      <p:sp>
+        <p:nvSpPr>
+          <p:cNvPr id="5019" name="Diamond 5018"/>
+          <p:cNvSpPr/>
           <p:nvPr>
             <p:custDataLst>
               <p:tags r:id="rId52"/>
@@ -5345,44 +5345,7 @@
         </p:nvSpPr>
         <p:spPr>
           <a:xfrm>
-            <a:off x="6069074" y="1871465"/>
-            <a:ext cx="285335" cy="153888"/>
-          </a:xfrm>
-          <a:prstGeom prst="rect">
-            <a:avLst/>
-          </a:prstGeom>
-          <a:noFill/>
-        </p:spPr>
-        <p:txBody>
-          <a:bodyPr vert="horz" wrap="none" lIns="0" tIns="0" rIns="0" bIns="0" rtlCol="0" anchorCtr="1">
-            <a:spAutoFit/>
-          </a:bodyPr>
-          <a:lstStyle/>
-          <a:p>
-            <a:r>
-              <a:rPr lang="en-US" sz="1000" dirty="0">
-                <a:solidFill>
-                  <a:schemeClr val="tx2"/>
-                </a:solidFill>
-              </a:rPr>
-              <a:t>Sep 2</a:t>
-            </a:r>
-          </a:p>
-        </p:txBody>
-      </p:sp>
-      <p:sp>
-        <p:nvSpPr>
-          <p:cNvPr id="5019" name="Diamond 5018"/>
-          <p:cNvSpPr/>
-          <p:nvPr>
-            <p:custDataLst>
-              <p:tags r:id="rId53"/>
-            </p:custDataLst>
-          </p:nvPr>
-        </p:nvSpPr>
-        <p:spPr>
-          <a:xfrm>
-            <a:off x="5617140" y="2358482"/>
+            <a:off x="6086759" y="2397006"/>
             <a:ext cx="228600" cy="254000"/>
           </a:xfrm>
           <a:prstGeom prst="diamond">
@@ -5451,7 +5414,40 @@
       </p:sp>
       <p:sp>
         <p:nvSpPr>
-          <p:cNvPr id="5021" name="TextBox 5020"/>
+          <p:cNvPr id="5062" name="TextBox 5061"/>
+          <p:cNvSpPr txBox="1"/>
+          <p:nvPr>
+            <p:custDataLst>
+              <p:tags r:id="rId53"/>
+            </p:custDataLst>
+          </p:nvPr>
+        </p:nvSpPr>
+        <p:spPr>
+          <a:xfrm>
+            <a:off x="203200" y="3527306"/>
+            <a:ext cx="367088" cy="167640"/>
+          </a:xfrm>
+          <a:prstGeom prst="rect">
+            <a:avLst/>
+          </a:prstGeom>
+          <a:noFill/>
+        </p:spPr>
+        <p:txBody>
+          <a:bodyPr vert="horz" wrap="square" lIns="0" tIns="0" rIns="0" bIns="0" rtlCol="0" anchor="ctr">
+            <a:spAutoFit/>
+          </a:bodyPr>
+          <a:lstStyle/>
+          <a:p>
+            <a:r>
+              <a:rPr lang="en-US" sz="1100" b="1" dirty="0"/>
+              <a:t>Hito 1</a:t>
+            </a:r>
+          </a:p>
+        </p:txBody>
+      </p:sp>
+      <p:sp>
+        <p:nvSpPr>
+          <p:cNvPr id="5065" name="TextBox 5064"/>
           <p:cNvSpPr txBox="1"/>
           <p:nvPr>
             <p:custDataLst>
@@ -5461,8 +5457,8 @@
         </p:nvSpPr>
         <p:spPr>
           <a:xfrm>
-            <a:off x="5783704" y="1746939"/>
-            <a:ext cx="703263" cy="138821"/>
+            <a:off x="2301031" y="3534926"/>
+            <a:ext cx="755651" cy="152400"/>
           </a:xfrm>
           <a:prstGeom prst="rect">
             <a:avLst/>
@@ -5470,26 +5466,22 @@
           <a:noFill/>
         </p:spPr>
         <p:txBody>
-          <a:bodyPr vert="horz" wrap="square" lIns="0" tIns="0" rIns="0" bIns="0" rtlCol="0" anchor="b" anchorCtr="1">
-            <a:spAutoFit/>
+          <a:bodyPr vert="horz" wrap="none" lIns="0" tIns="0" rIns="0" bIns="0" rtlCol="0" anchor="ctr">
+            <a:noAutofit/>
           </a:bodyPr>
           <a:lstStyle/>
           <a:p>
-            <a:pPr algn="ctr">
-              <a:lnSpc>
-                <a:spcPct val="80000"/>
-              </a:lnSpc>
-            </a:pPr>
-            <a:r>
-              <a:rPr lang="en-US" sz="1100" dirty="0"/>
-              <a:t>Milestone 1</a:t>
-            </a:r>
-          </a:p>
-        </p:txBody>
-      </p:sp>
-      <p:sp>
-        <p:nvSpPr>
-          <p:cNvPr id="5062" name="TextBox 5061"/>
+            <a:pPr algn="ctr"/>
+            <a:r>
+              <a:rPr lang="en-US" sz="1000" dirty="0"/>
+              <a:t>Sep 39 – Oct 7</a:t>
+            </a:r>
+          </a:p>
+        </p:txBody>
+      </p:sp>
+      <p:sp>
+        <p:nvSpPr>
+          <p:cNvPr id="5067" name="TextBox 5066" hidden="1"/>
           <p:cNvSpPr txBox="1"/>
           <p:nvPr>
             <p:custDataLst>
@@ -5499,41 +5491,8 @@
         </p:nvSpPr>
         <p:spPr>
           <a:xfrm>
-            <a:off x="203200" y="3527306"/>
-            <a:ext cx="367088" cy="167640"/>
-          </a:xfrm>
-          <a:prstGeom prst="rect">
-            <a:avLst/>
-          </a:prstGeom>
-          <a:noFill/>
-        </p:spPr>
-        <p:txBody>
-          <a:bodyPr vert="horz" wrap="square" lIns="0" tIns="0" rIns="0" bIns="0" rtlCol="0" anchor="ctr">
-            <a:spAutoFit/>
-          </a:bodyPr>
-          <a:lstStyle/>
-          <a:p>
-            <a:r>
-              <a:rPr lang="en-US" sz="1100" b="1"/>
-              <a:t>Task 1</a:t>
-            </a:r>
-          </a:p>
-        </p:txBody>
-      </p:sp>
-      <p:sp>
-        <p:nvSpPr>
-          <p:cNvPr id="5065" name="TextBox 5064"/>
-          <p:cNvSpPr txBox="1"/>
-          <p:nvPr>
-            <p:custDataLst>
-              <p:tags r:id="rId56"/>
-            </p:custDataLst>
-          </p:nvPr>
-        </p:nvSpPr>
-        <p:spPr>
-          <a:xfrm>
-            <a:off x="2301031" y="3534926"/>
-            <a:ext cx="755651" cy="152400"/>
+            <a:off x="12700" y="12700"/>
+            <a:ext cx="65" cy="153888"/>
           </a:xfrm>
           <a:prstGeom prst="rect">
             <a:avLst/>
@@ -5547,40 +5506,6 @@
           <a:lstStyle/>
           <a:p>
             <a:pPr algn="ctr"/>
-            <a:r>
-              <a:rPr lang="en-US" sz="1000" dirty="0"/>
-              <a:t>Sep 2 – Sep 30</a:t>
-            </a:r>
-          </a:p>
-        </p:txBody>
-      </p:sp>
-      <p:sp>
-        <p:nvSpPr>
-          <p:cNvPr id="5067" name="TextBox 5066" hidden="1"/>
-          <p:cNvSpPr txBox="1"/>
-          <p:nvPr>
-            <p:custDataLst>
-              <p:tags r:id="rId57"/>
-            </p:custDataLst>
-          </p:nvPr>
-        </p:nvSpPr>
-        <p:spPr>
-          <a:xfrm>
-            <a:off x="12700" y="12700"/>
-            <a:ext cx="65" cy="153888"/>
-          </a:xfrm>
-          <a:prstGeom prst="rect">
-            <a:avLst/>
-          </a:prstGeom>
-          <a:noFill/>
-        </p:spPr>
-        <p:txBody>
-          <a:bodyPr vert="horz" wrap="none" lIns="0" tIns="0" rIns="0" bIns="0" rtlCol="0" anchor="ctr">
-            <a:noAutofit/>
-          </a:bodyPr>
-          <a:lstStyle/>
-          <a:p>
-            <a:pPr algn="ctr"/>
             <a:endParaRPr lang="en-US" sz="1000"/>
           </a:p>
         </p:txBody>
@@ -5591,7 +5516,7 @@
           <p:cNvSpPr txBox="1"/>
           <p:nvPr>
             <p:custDataLst>
-              <p:tags r:id="rId58"/>
+              <p:tags r:id="rId56"/>
             </p:custDataLst>
           </p:nvPr>
         </p:nvSpPr>
@@ -5625,7 +5550,7 @@
           <p:cNvSpPr/>
           <p:nvPr>
             <p:custDataLst>
-              <p:tags r:id="rId59"/>
+              <p:tags r:id="rId57"/>
             </p:custDataLst>
           </p:nvPr>
         </p:nvSpPr>
@@ -5700,7 +5625,7 @@
           <p:cNvSpPr txBox="1"/>
           <p:nvPr>
             <p:custDataLst>
-              <p:tags r:id="rId60"/>
+              <p:tags r:id="rId58"/>
             </p:custDataLst>
           </p:nvPr>
         </p:nvSpPr>
@@ -5721,8 +5646,8 @@
           <a:lstStyle/>
           <a:p>
             <a:r>
-              <a:rPr lang="en-US" sz="1100" b="1"/>
-              <a:t>Task 2</a:t>
+              <a:rPr lang="en-US" sz="1100" b="1" dirty="0"/>
+              <a:t>Hito 2</a:t>
             </a:r>
           </a:p>
         </p:txBody>
@@ -5733,7 +5658,7 @@
           <p:cNvSpPr txBox="1"/>
           <p:nvPr>
             <p:custDataLst>
-              <p:tags r:id="rId61"/>
+              <p:tags r:id="rId59"/>
             </p:custDataLst>
           </p:nvPr>
         </p:nvSpPr>
@@ -5764,7 +5689,7 @@
           <p:cNvSpPr txBox="1"/>
           <p:nvPr>
             <p:custDataLst>
-              <p:tags r:id="rId62"/>
+              <p:tags r:id="rId60"/>
             </p:custDataLst>
           </p:nvPr>
         </p:nvSpPr>
@@ -5798,7 +5723,7 @@
           <p:cNvSpPr txBox="1"/>
           <p:nvPr>
             <p:custDataLst>
-              <p:tags r:id="rId63"/>
+              <p:tags r:id="rId61"/>
             </p:custDataLst>
           </p:nvPr>
         </p:nvSpPr>
@@ -5829,7 +5754,7 @@
           <p:cNvSpPr txBox="1"/>
           <p:nvPr>
             <p:custDataLst>
-              <p:tags r:id="rId64"/>
+              <p:tags r:id="rId62"/>
             </p:custDataLst>
           </p:nvPr>
         </p:nvSpPr>
@@ -5863,7 +5788,7 @@
           <p:cNvSpPr txBox="1"/>
           <p:nvPr>
             <p:custDataLst>
-              <p:tags r:id="rId65"/>
+              <p:tags r:id="rId63"/>
             </p:custDataLst>
           </p:nvPr>
         </p:nvSpPr>
@@ -5894,7 +5819,7 @@
           <p:cNvSpPr txBox="1"/>
           <p:nvPr>
             <p:custDataLst>
-              <p:tags r:id="rId66"/>
+              <p:tags r:id="rId64"/>
             </p:custDataLst>
           </p:nvPr>
         </p:nvSpPr>
@@ -5928,7 +5853,7 @@
           <p:cNvSpPr txBox="1"/>
           <p:nvPr>
             <p:custDataLst>
-              <p:tags r:id="rId67"/>
+              <p:tags r:id="rId65"/>
             </p:custDataLst>
           </p:nvPr>
         </p:nvSpPr>
@@ -5959,7 +5884,7 @@
           <p:cNvSpPr txBox="1"/>
           <p:nvPr>
             <p:custDataLst>
-              <p:tags r:id="rId68"/>
+              <p:tags r:id="rId66"/>
             </p:custDataLst>
           </p:nvPr>
         </p:nvSpPr>
@@ -5993,7 +5918,7 @@
           <p:cNvSpPr/>
           <p:nvPr>
             <p:custDataLst>
-              <p:tags r:id="rId69"/>
+              <p:tags r:id="rId67"/>
             </p:custDataLst>
           </p:nvPr>
         </p:nvSpPr>
@@ -6059,7 +5984,7 @@
           <p:cNvSpPr txBox="1"/>
           <p:nvPr>
             <p:custDataLst>
-              <p:tags r:id="rId70"/>
+              <p:tags r:id="rId68"/>
             </p:custDataLst>
           </p:nvPr>
         </p:nvSpPr>
@@ -6090,7 +6015,7 @@
           <p:cNvSpPr txBox="1"/>
           <p:nvPr>
             <p:custDataLst>
-              <p:tags r:id="rId71"/>
+              <p:tags r:id="rId69"/>
             </p:custDataLst>
           </p:nvPr>
         </p:nvSpPr>
@@ -6124,7 +6049,7 @@
           <p:cNvSpPr/>
           <p:nvPr>
             <p:custDataLst>
-              <p:tags r:id="rId72"/>
+              <p:tags r:id="rId70"/>
             </p:custDataLst>
           </p:nvPr>
         </p:nvSpPr>
@@ -6184,26 +6109,196 @@
           </a:p>
         </p:txBody>
       </p:sp>
+      <p:sp>
+        <p:nvSpPr>
+          <p:cNvPr id="113" name="Rectangle 5071">
+            <a:extLst>
+              <a:ext uri="{FF2B5EF4-FFF2-40B4-BE49-F238E27FC236}">
+                <a16:creationId xmlns:a16="http://schemas.microsoft.com/office/drawing/2014/main" id="{D359AE96-73A5-4FF6-A00B-36380BEF7117}"/>
+              </a:ext>
+            </a:extLst>
+          </p:cNvPr>
+          <p:cNvSpPr/>
+          <p:nvPr>
+            <p:custDataLst>
+              <p:tags r:id="rId71"/>
+            </p:custDataLst>
+          </p:nvPr>
+        </p:nvSpPr>
+        <p:spPr>
+          <a:xfrm>
+            <a:off x="1262873" y="3857506"/>
+            <a:ext cx="2158194" cy="203200"/>
+          </a:xfrm>
+          <a:prstGeom prst="rect">
+            <a:avLst/>
+          </a:prstGeom>
+          <a:solidFill>
+            <a:schemeClr val="tx1">
+              <a:alpha val="35000"/>
+            </a:schemeClr>
+          </a:solidFill>
+          <a:ln w="12700" cap="flat" cmpd="sng" algn="ctr">
+            <a:noFill/>
+            <a:prstDash val="solid"/>
+            <a:miter lim="800000"/>
+          </a:ln>
+          <a:effectLst/>
+          <a:extLst>
+            <a:ext uri="{91240B29-F687-4F45-9708-019B960494DF}">
+              <a14:hiddenLine xmlns:a14="http://schemas.microsoft.com/office/drawing/2010/main" w="12700" cap="flat" cmpd="sng" algn="ctr">
+                <a:solidFill>
+                  <a:schemeClr val="accent1">
+                    <a:shade val="50000"/>
+                  </a:schemeClr>
+                </a:solidFill>
+                <a:prstDash val="solid"/>
+                <a:miter lim="800000"/>
+              </a14:hiddenLine>
+            </a:ext>
+          </a:extLst>
+        </p:spPr>
+        <p:style>
+          <a:lnRef idx="2">
+            <a:schemeClr val="accent1">
+              <a:shade val="50000"/>
+            </a:schemeClr>
+          </a:lnRef>
+          <a:fillRef idx="1">
+            <a:schemeClr val="accent1"/>
+          </a:fillRef>
+          <a:effectRef idx="0">
+            <a:schemeClr val="accent1"/>
+          </a:effectRef>
+          <a:fontRef idx="minor">
+            <a:schemeClr val="lt1"/>
+          </a:fontRef>
+        </p:style>
+        <p:txBody>
+          <a:bodyPr wrap="none" lIns="0" tIns="0" rIns="0" bIns="0" rtlCol="0" anchor="ctr"/>
+          <a:lstStyle/>
+          <a:p>
+            <a:pPr algn="r"/>
+            <a:r>
+              <a:rPr lang="en-US" sz="1000" dirty="0">
+                <a:solidFill>
+                  <a:srgbClr val="F1E6E6"/>
+                </a:solidFill>
+              </a:rPr>
+              <a:t>100% </a:t>
+            </a:r>
+          </a:p>
+        </p:txBody>
+      </p:sp>
       <p:cxnSp>
         <p:nvCxnSpPr>
-          <p:cNvPr id="110" name="Straight Connector 5008">
+          <p:cNvPr id="114" name="Straight Connector 5075">
             <a:extLst>
               <a:ext uri="{FF2B5EF4-FFF2-40B4-BE49-F238E27FC236}">
-                <a16:creationId xmlns:a16="http://schemas.microsoft.com/office/drawing/2014/main" id="{8B12A604-8F24-4561-B368-A2034F595795}"/>
+                <a16:creationId xmlns:a16="http://schemas.microsoft.com/office/drawing/2014/main" id="{10998E17-7400-4123-9584-47D68A4EC138}"/>
               </a:ext>
             </a:extLst>
           </p:cNvPr>
           <p:cNvCxnSpPr/>
           <p:nvPr>
             <p:custDataLst>
+              <p:tags r:id="rId72"/>
+            </p:custDataLst>
+          </p:nvPr>
+        </p:nvCxnSpPr>
+        <p:spPr>
+          <a:xfrm>
+            <a:off x="661988" y="3959106"/>
+            <a:ext cx="600886" cy="0"/>
+          </a:xfrm>
+          <a:prstGeom prst="line">
+            <a:avLst/>
+          </a:prstGeom>
+          <a:ln w="1270">
+            <a:solidFill>
+              <a:srgbClr val="CCCCCC"/>
+            </a:solidFill>
+            <a:headEnd type="none"/>
+            <a:tailEnd type="none"/>
+          </a:ln>
+        </p:spPr>
+        <p:style>
+          <a:lnRef idx="1">
+            <a:schemeClr val="accent1"/>
+          </a:lnRef>
+          <a:fillRef idx="0">
+            <a:schemeClr val="accent1"/>
+          </a:fillRef>
+          <a:effectRef idx="0">
+            <a:schemeClr val="accent1"/>
+          </a:effectRef>
+          <a:fontRef idx="minor">
+            <a:schemeClr val="tx1"/>
+          </a:fontRef>
+        </p:style>
+      </p:cxnSp>
+      <p:sp>
+        <p:nvSpPr>
+          <p:cNvPr id="115" name="TextBox 5064">
+            <a:extLst>
+              <a:ext uri="{FF2B5EF4-FFF2-40B4-BE49-F238E27FC236}">
+                <a16:creationId xmlns:a16="http://schemas.microsoft.com/office/drawing/2014/main" id="{381E62DE-04FB-4326-B07C-A321EC87B826}"/>
+              </a:ext>
+            </a:extLst>
+          </p:cNvPr>
+          <p:cNvSpPr txBox="1"/>
+          <p:nvPr>
+            <p:custDataLst>
               <p:tags r:id="rId73"/>
             </p:custDataLst>
           </p:nvPr>
+        </p:nvSpPr>
+        <p:spPr>
+          <a:xfrm>
+            <a:off x="3454935" y="3872746"/>
+            <a:ext cx="755651" cy="152400"/>
+          </a:xfrm>
+          <a:prstGeom prst="rect">
+            <a:avLst/>
+          </a:prstGeom>
+          <a:noFill/>
+        </p:spPr>
+        <p:txBody>
+          <a:bodyPr vert="horz" wrap="none" lIns="0" tIns="0" rIns="0" bIns="0" rtlCol="0" anchor="ctr">
+            <a:noAutofit/>
+          </a:bodyPr>
+          <a:lstStyle/>
+          <a:p>
+            <a:pPr algn="ctr"/>
+            <a:r>
+              <a:rPr lang="en-US" sz="1000" dirty="0"/>
+              <a:t>Oct 3 – Oct 8</a:t>
+            </a:r>
+          </a:p>
+        </p:txBody>
+      </p:sp>
+      <p:cxnSp>
+        <p:nvCxnSpPr>
+          <p:cNvPr id="116" name="Straight Connector 5008">
+            <a:extLst>
+              <a:ext uri="{FF2B5EF4-FFF2-40B4-BE49-F238E27FC236}">
+                <a16:creationId xmlns:a16="http://schemas.microsoft.com/office/drawing/2014/main" id="{B045056D-47C0-4296-8EFD-233CE33FC94E}"/>
+              </a:ext>
+            </a:extLst>
+          </p:cNvPr>
+          <p:cNvCxnSpPr>
+            <a:cxnSpLocks/>
+          </p:cNvCxnSpPr>
+          <p:nvPr>
+            <p:custDataLst>
+              <p:tags r:id="rId74"/>
+            </p:custDataLst>
+          </p:nvPr>
         </p:nvCxnSpPr>
         <p:spPr>
           <a:xfrm>
-            <a:off x="5882351" y="2025353"/>
-            <a:ext cx="0" cy="524052"/>
+            <a:off x="6519588" y="2352510"/>
+            <a:ext cx="0" cy="196895"/>
           </a:xfrm>
           <a:prstGeom prst="line">
             <a:avLst/>
@@ -6240,23 +6335,23 @@
       </p:cxnSp>
       <p:sp>
         <p:nvSpPr>
-          <p:cNvPr id="111" name="Flowchart: Merge 5002">
+          <p:cNvPr id="119" name="Flowchart: Merge 5002">
             <a:extLst>
               <a:ext uri="{FF2B5EF4-FFF2-40B4-BE49-F238E27FC236}">
-                <a16:creationId xmlns:a16="http://schemas.microsoft.com/office/drawing/2014/main" id="{98F2E7EA-C3A6-45B9-B7C9-34EDD2760617}"/>
+                <a16:creationId xmlns:a16="http://schemas.microsoft.com/office/drawing/2014/main" id="{52CCBFE0-AB0A-449B-A8EB-F3BF8AC5F066}"/>
               </a:ext>
             </a:extLst>
           </p:cNvPr>
           <p:cNvSpPr/>
           <p:nvPr>
             <p:custDataLst>
-              <p:tags r:id="rId74"/>
+              <p:tags r:id="rId75"/>
             </p:custDataLst>
           </p:nvPr>
         </p:nvSpPr>
         <p:spPr>
           <a:xfrm rot="16200000">
-            <a:off x="5884301" y="1868830"/>
+            <a:off x="6511346" y="2298402"/>
             <a:ext cx="165100" cy="165100"/>
           </a:xfrm>
           <a:prstGeom prst="flowChartMerge">
@@ -6325,315 +6420,6 @@
       </p:sp>
       <p:sp>
         <p:nvSpPr>
-          <p:cNvPr id="113" name="Rectangle 5071">
-            <a:extLst>
-              <a:ext uri="{FF2B5EF4-FFF2-40B4-BE49-F238E27FC236}">
-                <a16:creationId xmlns:a16="http://schemas.microsoft.com/office/drawing/2014/main" id="{D359AE96-73A5-4FF6-A00B-36380BEF7117}"/>
-              </a:ext>
-            </a:extLst>
-          </p:cNvPr>
-          <p:cNvSpPr/>
-          <p:nvPr>
-            <p:custDataLst>
-              <p:tags r:id="rId75"/>
-            </p:custDataLst>
-          </p:nvPr>
-        </p:nvSpPr>
-        <p:spPr>
-          <a:xfrm>
-            <a:off x="1262873" y="3857506"/>
-            <a:ext cx="2158194" cy="203200"/>
-          </a:xfrm>
-          <a:prstGeom prst="rect">
-            <a:avLst/>
-          </a:prstGeom>
-          <a:solidFill>
-            <a:schemeClr val="tx1">
-              <a:alpha val="35000"/>
-            </a:schemeClr>
-          </a:solidFill>
-          <a:ln w="12700" cap="flat" cmpd="sng" algn="ctr">
-            <a:noFill/>
-            <a:prstDash val="solid"/>
-            <a:miter lim="800000"/>
-          </a:ln>
-          <a:effectLst/>
-          <a:extLst>
-            <a:ext uri="{91240B29-F687-4F45-9708-019B960494DF}">
-              <a14:hiddenLine xmlns:a14="http://schemas.microsoft.com/office/drawing/2010/main" w="12700" cap="flat" cmpd="sng" algn="ctr">
-                <a:solidFill>
-                  <a:schemeClr val="accent1">
-                    <a:shade val="50000"/>
-                  </a:schemeClr>
-                </a:solidFill>
-                <a:prstDash val="solid"/>
-                <a:miter lim="800000"/>
-              </a14:hiddenLine>
-            </a:ext>
-          </a:extLst>
-        </p:spPr>
-        <p:style>
-          <a:lnRef idx="2">
-            <a:schemeClr val="accent1">
-              <a:shade val="50000"/>
-            </a:schemeClr>
-          </a:lnRef>
-          <a:fillRef idx="1">
-            <a:schemeClr val="accent1"/>
-          </a:fillRef>
-          <a:effectRef idx="0">
-            <a:schemeClr val="accent1"/>
-          </a:effectRef>
-          <a:fontRef idx="minor">
-            <a:schemeClr val="lt1"/>
-          </a:fontRef>
-        </p:style>
-        <p:txBody>
-          <a:bodyPr wrap="none" lIns="0" tIns="0" rIns="0" bIns="0" rtlCol="0" anchor="ctr"/>
-          <a:lstStyle/>
-          <a:p>
-            <a:pPr algn="r"/>
-            <a:r>
-              <a:rPr lang="en-US" sz="1000" dirty="0">
-                <a:solidFill>
-                  <a:srgbClr val="F1E6E6"/>
-                </a:solidFill>
-              </a:rPr>
-              <a:t>100% </a:t>
-            </a:r>
-          </a:p>
-        </p:txBody>
-      </p:sp>
-      <p:cxnSp>
-        <p:nvCxnSpPr>
-          <p:cNvPr id="114" name="Straight Connector 5075">
-            <a:extLst>
-              <a:ext uri="{FF2B5EF4-FFF2-40B4-BE49-F238E27FC236}">
-                <a16:creationId xmlns:a16="http://schemas.microsoft.com/office/drawing/2014/main" id="{10998E17-7400-4123-9584-47D68A4EC138}"/>
-              </a:ext>
-            </a:extLst>
-          </p:cNvPr>
-          <p:cNvCxnSpPr/>
-          <p:nvPr>
-            <p:custDataLst>
-              <p:tags r:id="rId76"/>
-            </p:custDataLst>
-          </p:nvPr>
-        </p:nvCxnSpPr>
-        <p:spPr>
-          <a:xfrm>
-            <a:off x="661988" y="3959106"/>
-            <a:ext cx="600886" cy="0"/>
-          </a:xfrm>
-          <a:prstGeom prst="line">
-            <a:avLst/>
-          </a:prstGeom>
-          <a:ln w="1270">
-            <a:solidFill>
-              <a:srgbClr val="CCCCCC"/>
-            </a:solidFill>
-            <a:headEnd type="none"/>
-            <a:tailEnd type="none"/>
-          </a:ln>
-        </p:spPr>
-        <p:style>
-          <a:lnRef idx="1">
-            <a:schemeClr val="accent1"/>
-          </a:lnRef>
-          <a:fillRef idx="0">
-            <a:schemeClr val="accent1"/>
-          </a:fillRef>
-          <a:effectRef idx="0">
-            <a:schemeClr val="accent1"/>
-          </a:effectRef>
-          <a:fontRef idx="minor">
-            <a:schemeClr val="tx1"/>
-          </a:fontRef>
-        </p:style>
-      </p:cxnSp>
-      <p:sp>
-        <p:nvSpPr>
-          <p:cNvPr id="115" name="TextBox 5064">
-            <a:extLst>
-              <a:ext uri="{FF2B5EF4-FFF2-40B4-BE49-F238E27FC236}">
-                <a16:creationId xmlns:a16="http://schemas.microsoft.com/office/drawing/2014/main" id="{381E62DE-04FB-4326-B07C-A321EC87B826}"/>
-              </a:ext>
-            </a:extLst>
-          </p:cNvPr>
-          <p:cNvSpPr txBox="1"/>
-          <p:nvPr>
-            <p:custDataLst>
-              <p:tags r:id="rId77"/>
-            </p:custDataLst>
-          </p:nvPr>
-        </p:nvSpPr>
-        <p:spPr>
-          <a:xfrm>
-            <a:off x="3454935" y="3872746"/>
-            <a:ext cx="755651" cy="152400"/>
-          </a:xfrm>
-          <a:prstGeom prst="rect">
-            <a:avLst/>
-          </a:prstGeom>
-          <a:noFill/>
-        </p:spPr>
-        <p:txBody>
-          <a:bodyPr vert="horz" wrap="none" lIns="0" tIns="0" rIns="0" bIns="0" rtlCol="0" anchor="ctr">
-            <a:noAutofit/>
-          </a:bodyPr>
-          <a:lstStyle/>
-          <a:p>
-            <a:pPr algn="ctr"/>
-            <a:r>
-              <a:rPr lang="en-US" sz="1000" dirty="0"/>
-              <a:t>Sep 30 – Oct 7</a:t>
-            </a:r>
-          </a:p>
-        </p:txBody>
-      </p:sp>
-      <p:cxnSp>
-        <p:nvCxnSpPr>
-          <p:cNvPr id="116" name="Straight Connector 5008">
-            <a:extLst>
-              <a:ext uri="{FF2B5EF4-FFF2-40B4-BE49-F238E27FC236}">
-                <a16:creationId xmlns:a16="http://schemas.microsoft.com/office/drawing/2014/main" id="{B045056D-47C0-4296-8EFD-233CE33FC94E}"/>
-              </a:ext>
-            </a:extLst>
-          </p:cNvPr>
-          <p:cNvCxnSpPr>
-            <a:cxnSpLocks/>
-          </p:cNvCxnSpPr>
-          <p:nvPr>
-            <p:custDataLst>
-              <p:tags r:id="rId78"/>
-            </p:custDataLst>
-          </p:nvPr>
-        </p:nvCxnSpPr>
-        <p:spPr>
-          <a:xfrm>
-            <a:off x="6519588" y="2352510"/>
-            <a:ext cx="0" cy="196895"/>
-          </a:xfrm>
-          <a:prstGeom prst="line">
-            <a:avLst/>
-          </a:prstGeom>
-          <a:ln w="15875">
-            <a:solidFill>
-              <a:schemeClr val="tx1"/>
-            </a:solidFill>
-            <a:headEnd type="none"/>
-            <a:tailEnd type="none"/>
-          </a:ln>
-          <a:effectLst>
-            <a:outerShdw blurRad="63500">
-              <a:scrgbClr r="0" g="0" b="0">
-                <a:alpha val="50000"/>
-              </a:scrgbClr>
-            </a:outerShdw>
-          </a:effectLst>
-        </p:spPr>
-        <p:style>
-          <a:lnRef idx="1">
-            <a:schemeClr val="accent1"/>
-          </a:lnRef>
-          <a:fillRef idx="0">
-            <a:schemeClr val="accent1"/>
-          </a:fillRef>
-          <a:effectRef idx="0">
-            <a:schemeClr val="accent1"/>
-          </a:effectRef>
-          <a:fontRef idx="minor">
-            <a:schemeClr val="tx1"/>
-          </a:fontRef>
-        </p:style>
-      </p:cxnSp>
-      <p:sp>
-        <p:nvSpPr>
-          <p:cNvPr id="119" name="Flowchart: Merge 5002">
-            <a:extLst>
-              <a:ext uri="{FF2B5EF4-FFF2-40B4-BE49-F238E27FC236}">
-                <a16:creationId xmlns:a16="http://schemas.microsoft.com/office/drawing/2014/main" id="{52CCBFE0-AB0A-449B-A8EB-F3BF8AC5F066}"/>
-              </a:ext>
-            </a:extLst>
-          </p:cNvPr>
-          <p:cNvSpPr/>
-          <p:nvPr>
-            <p:custDataLst>
-              <p:tags r:id="rId79"/>
-            </p:custDataLst>
-          </p:nvPr>
-        </p:nvSpPr>
-        <p:spPr>
-          <a:xfrm rot="16200000">
-            <a:off x="6511346" y="2298402"/>
-            <a:ext cx="165100" cy="165100"/>
-          </a:xfrm>
-          <a:prstGeom prst="flowChartMerge">
-            <a:avLst/>
-          </a:prstGeom>
-          <a:solidFill>
-            <a:schemeClr val="tx1"/>
-          </a:solidFill>
-          <a:ln w="12700" cap="flat" cmpd="sng" algn="ctr">
-            <a:noFill/>
-            <a:prstDash val="solid"/>
-            <a:miter lim="800000"/>
-          </a:ln>
-          <a:effectLst>
-            <a:outerShdw blurRad="63500">
-              <a:scrgbClr r="0" g="0" b="0">
-                <a:alpha val="50000"/>
-              </a:scrgbClr>
-            </a:outerShdw>
-          </a:effectLst>
-          <a:scene3d>
-            <a:camera prst="orthographicFront"/>
-            <a:lightRig rig="threePt" dir="t"/>
-          </a:scene3d>
-          <a:sp3d>
-            <a:bevelT h="12700"/>
-          </a:sp3d>
-          <a:extLst>
-            <a:ext uri="{91240B29-F687-4F45-9708-019B960494DF}">
-              <a14:hiddenLine xmlns:a14="http://schemas.microsoft.com/office/drawing/2010/main" w="12700" cap="flat" cmpd="sng" algn="ctr">
-                <a:solidFill>
-                  <a:schemeClr val="accent1">
-                    <a:shade val="50000"/>
-                  </a:schemeClr>
-                </a:solidFill>
-                <a:prstDash val="solid"/>
-                <a:miter lim="800000"/>
-              </a14:hiddenLine>
-            </a:ext>
-          </a:extLst>
-        </p:spPr>
-        <p:style>
-          <a:lnRef idx="2">
-            <a:schemeClr val="accent1">
-              <a:shade val="50000"/>
-            </a:schemeClr>
-          </a:lnRef>
-          <a:fillRef idx="1">
-            <a:schemeClr val="accent1"/>
-          </a:fillRef>
-          <a:effectRef idx="0">
-            <a:schemeClr val="accent1"/>
-          </a:effectRef>
-          <a:fontRef idx="minor">
-            <a:schemeClr val="lt1"/>
-          </a:fontRef>
-        </p:style>
-        <p:txBody>
-          <a:bodyPr rtlCol="0" anchor="ctr"/>
-          <a:lstStyle/>
-          <a:p>
-            <a:pPr algn="ctr"/>
-            <a:endParaRPr lang="en-US"/>
-          </a:p>
-        </p:txBody>
-      </p:sp>
-      <p:sp>
-        <p:nvSpPr>
           <p:cNvPr id="120" name="TextBox 5012">
             <a:extLst>
               <a:ext uri="{FF2B5EF4-FFF2-40B4-BE49-F238E27FC236}">
@@ -6644,7 +6430,7 @@
           <p:cNvSpPr txBox="1"/>
           <p:nvPr>
             <p:custDataLst>
-              <p:tags r:id="rId80"/>
+              <p:tags r:id="rId76"/>
             </p:custDataLst>
           </p:nvPr>
         </p:nvSpPr>
@@ -6671,7 +6457,7 @@
             </a:pPr>
             <a:r>
               <a:rPr lang="en-US" sz="1100" dirty="0"/>
-              <a:t>Milestone 3</a:t>
+              <a:t>Hito 2</a:t>
             </a:r>
           </a:p>
         </p:txBody>
@@ -6688,7 +6474,7 @@
           <p:cNvSpPr txBox="1"/>
           <p:nvPr>
             <p:custDataLst>
-              <p:tags r:id="rId81"/>
+              <p:tags r:id="rId77"/>
             </p:custDataLst>
           </p:nvPr>
         </p:nvSpPr>
@@ -7187,31 +6973,7 @@
 </p:tagLst>
 </file>
 
-<file path=ppt/tags/tag78.xml><?xml version="1.0" encoding="utf-8"?>
-<p:tagLst xmlns:a="http://schemas.openxmlformats.org/drawingml/2006/main" xmlns:r="http://schemas.openxmlformats.org/officeDocument/2006/relationships" xmlns:p="http://schemas.openxmlformats.org/presentationml/2006/main">
-  <p:tag name="OTLMARKERSHAPE" val="OTL"/>
-</p:tagLst>
-</file>
-
-<file path=ppt/tags/tag79.xml><?xml version="1.0" encoding="utf-8"?>
-<p:tagLst xmlns:a="http://schemas.openxmlformats.org/drawingml/2006/main" xmlns:r="http://schemas.openxmlformats.org/officeDocument/2006/relationships" xmlns:p="http://schemas.openxmlformats.org/presentationml/2006/main">
-  <p:tag name="OTLMARKERSHAPE" val="OTL"/>
-</p:tagLst>
-</file>
-
 <file path=ppt/tags/tag8.xml><?xml version="1.0" encoding="utf-8"?>
-<p:tagLst xmlns:a="http://schemas.openxmlformats.org/drawingml/2006/main" xmlns:r="http://schemas.openxmlformats.org/officeDocument/2006/relationships" xmlns:p="http://schemas.openxmlformats.org/presentationml/2006/main">
-  <p:tag name="OTLMARKERSHAPE" val="OTL"/>
-</p:tagLst>
-</file>
-
-<file path=ppt/tags/tag80.xml><?xml version="1.0" encoding="utf-8"?>
-<p:tagLst xmlns:a="http://schemas.openxmlformats.org/drawingml/2006/main" xmlns:r="http://schemas.openxmlformats.org/officeDocument/2006/relationships" xmlns:p="http://schemas.openxmlformats.org/presentationml/2006/main">
-  <p:tag name="OTLMARKERSHAPE" val="OTL"/>
-</p:tagLst>
-</file>
-
-<file path=ppt/tags/tag81.xml><?xml version="1.0" encoding="utf-8"?>
 <p:tagLst xmlns:a="http://schemas.openxmlformats.org/drawingml/2006/main" xmlns:r="http://schemas.openxmlformats.org/officeDocument/2006/relationships" xmlns:p="http://schemas.openxmlformats.org/presentationml/2006/main">
   <p:tag name="OTLMARKERSHAPE" val="OTL"/>
 </p:tagLst>
@@ -7485,68 +7247,15 @@
 </file>
 
 <file path=customXml/item1.xml><?xml version="1.0" encoding="utf-8"?>
-<p:properties xmlns:p="http://schemas.microsoft.com/office/2006/metadata/properties" xmlns:xsi="http://www.w3.org/2001/XMLSchema-instance" xmlns:pc="http://schemas.microsoft.com/office/infopath/2007/PartnerControls">
-  <documentManagement>
-    <_dlc_DocId xmlns="01eb4bd6-a8ff-4439-b7eb-fe0a650fbd8a">FWJASSSE55TN-275-99</_dlc_DocId>
-    <_dlc_DocIdUrl xmlns="01eb4bd6-a8ff-4439-b7eb-fe0a650fbd8a">
-      <Url>https://portal.smrey.net/areas/it/_layouts/15/DocIdRedir.aspx?ID=FWJASSSE55TN-275-99</Url>
-      <Description>FWJASSSE55TN-275-99</Description>
-    </_dlc_DocIdUrl>
-  </documentManagement>
-</p:properties>
+<?mso-contentType ?>
+<FormTemplates xmlns="http://schemas.microsoft.com/sharepoint/v3/contenttype/forms">
+  <Display>DocumentLibraryForm</Display>
+  <Edit>DocumentLibraryForm</Edit>
+  <New>DocumentLibraryForm</New>
+</FormTemplates>
 </file>
 
 <file path=customXml/item2.xml><?xml version="1.0" encoding="utf-8"?>
-<?mso-contentType ?>
-<spe:Receivers xmlns:spe="http://schemas.microsoft.com/sharepoint/events">
-  <Receiver>
-    <Name>Document ID Generator</Name>
-    <Synchronization>Synchronous</Synchronization>
-    <Type>10001</Type>
-    <SequenceNumber>1000</SequenceNumber>
-    <Url/>
-    <Assembly>Microsoft.Office.DocumentManagement, Version=15.0.0.0, Culture=neutral, PublicKeyToken=71e9bce111e9429c</Assembly>
-    <Class>Microsoft.Office.DocumentManagement.Internal.DocIdHandler</Class>
-    <Data/>
-    <Filter/>
-  </Receiver>
-  <Receiver>
-    <Name>Document ID Generator</Name>
-    <Synchronization>Synchronous</Synchronization>
-    <Type>10002</Type>
-    <SequenceNumber>1001</SequenceNumber>
-    <Url/>
-    <Assembly>Microsoft.Office.DocumentManagement, Version=15.0.0.0, Culture=neutral, PublicKeyToken=71e9bce111e9429c</Assembly>
-    <Class>Microsoft.Office.DocumentManagement.Internal.DocIdHandler</Class>
-    <Data/>
-    <Filter/>
-  </Receiver>
-  <Receiver>
-    <Name>Document ID Generator</Name>
-    <Synchronization>Synchronous</Synchronization>
-    <Type>10004</Type>
-    <SequenceNumber>1002</SequenceNumber>
-    <Url/>
-    <Assembly>Microsoft.Office.DocumentManagement, Version=15.0.0.0, Culture=neutral, PublicKeyToken=71e9bce111e9429c</Assembly>
-    <Class>Microsoft.Office.DocumentManagement.Internal.DocIdHandler</Class>
-    <Data/>
-    <Filter/>
-  </Receiver>
-  <Receiver>
-    <Name>Document ID Generator</Name>
-    <Synchronization>Synchronous</Synchronization>
-    <Type>10006</Type>
-    <SequenceNumber>1003</SequenceNumber>
-    <Url/>
-    <Assembly>Microsoft.Office.DocumentManagement, Version=15.0.0.0, Culture=neutral, PublicKeyToken=71e9bce111e9429c</Assembly>
-    <Class>Microsoft.Office.DocumentManagement.Internal.DocIdHandler</Class>
-    <Data/>
-    <Filter/>
-  </Receiver>
-</spe:Receivers>
-</file>
-
-<file path=customXml/item3.xml><?xml version="1.0" encoding="utf-8"?>
 <ct:contentTypeSchema xmlns:ct="http://schemas.microsoft.com/office/2006/metadata/contentType" xmlns:ma="http://schemas.microsoft.com/office/2006/metadata/properties/metaAttributes" ct:_="" ma:_="" ma:contentTypeName="Documento" ma:contentTypeID="0x010100A5124E24CAF14D46B2DD609ACFD84C07" ma:contentTypeVersion="0" ma:contentTypeDescription="Crear nuevo documento." ma:contentTypeScope="" ma:versionID="de664effb0a23aec775b6884083f1507">
   <xsd:schema xmlns:xsd="http://www.w3.org/2001/XMLSchema" xmlns:xs="http://www.w3.org/2001/XMLSchema" xmlns:p="http://schemas.microsoft.com/office/2006/metadata/properties" xmlns:ns2="01eb4bd6-a8ff-4439-b7eb-fe0a650fbd8a" targetNamespace="http://schemas.microsoft.com/office/2006/metadata/properties" ma:root="true" ma:fieldsID="d8ef9ce5e2f992f4a0d6f8aeafc38bc7" ns2:_="">
     <xsd:import namespace="01eb4bd6-a8ff-4439-b7eb-fe0a650fbd8a"/>
@@ -7691,40 +7400,77 @@
 </ct:contentTypeSchema>
 </file>
 
+<file path=customXml/item3.xml><?xml version="1.0" encoding="utf-8"?>
+<?mso-contentType ?>
+<spe:Receivers xmlns:spe="http://schemas.microsoft.com/sharepoint/events">
+  <Receiver>
+    <Name>Document ID Generator</Name>
+    <Synchronization>Synchronous</Synchronization>
+    <Type>10001</Type>
+    <SequenceNumber>1000</SequenceNumber>
+    <Url/>
+    <Assembly>Microsoft.Office.DocumentManagement, Version=15.0.0.0, Culture=neutral, PublicKeyToken=71e9bce111e9429c</Assembly>
+    <Class>Microsoft.Office.DocumentManagement.Internal.DocIdHandler</Class>
+    <Data/>
+    <Filter/>
+  </Receiver>
+  <Receiver>
+    <Name>Document ID Generator</Name>
+    <Synchronization>Synchronous</Synchronization>
+    <Type>10002</Type>
+    <SequenceNumber>1001</SequenceNumber>
+    <Url/>
+    <Assembly>Microsoft.Office.DocumentManagement, Version=15.0.0.0, Culture=neutral, PublicKeyToken=71e9bce111e9429c</Assembly>
+    <Class>Microsoft.Office.DocumentManagement.Internal.DocIdHandler</Class>
+    <Data/>
+    <Filter/>
+  </Receiver>
+  <Receiver>
+    <Name>Document ID Generator</Name>
+    <Synchronization>Synchronous</Synchronization>
+    <Type>10004</Type>
+    <SequenceNumber>1002</SequenceNumber>
+    <Url/>
+    <Assembly>Microsoft.Office.DocumentManagement, Version=15.0.0.0, Culture=neutral, PublicKeyToken=71e9bce111e9429c</Assembly>
+    <Class>Microsoft.Office.DocumentManagement.Internal.DocIdHandler</Class>
+    <Data/>
+    <Filter/>
+  </Receiver>
+  <Receiver>
+    <Name>Document ID Generator</Name>
+    <Synchronization>Synchronous</Synchronization>
+    <Type>10006</Type>
+    <SequenceNumber>1003</SequenceNumber>
+    <Url/>
+    <Assembly>Microsoft.Office.DocumentManagement, Version=15.0.0.0, Culture=neutral, PublicKeyToken=71e9bce111e9429c</Assembly>
+    <Class>Microsoft.Office.DocumentManagement.Internal.DocIdHandler</Class>
+    <Data/>
+    <Filter/>
+  </Receiver>
+</spe:Receivers>
+</file>
+
 <file path=customXml/item4.xml><?xml version="1.0" encoding="utf-8"?>
-<?mso-contentType ?>
-<FormTemplates xmlns="http://schemas.microsoft.com/sharepoint/v3/contenttype/forms">
-  <Display>DocumentLibraryForm</Display>
-  <Edit>DocumentLibraryForm</Edit>
-  <New>DocumentLibraryForm</New>
-</FormTemplates>
+<p:properties xmlns:p="http://schemas.microsoft.com/office/2006/metadata/properties" xmlns:xsi="http://www.w3.org/2001/XMLSchema-instance" xmlns:pc="http://schemas.microsoft.com/office/infopath/2007/PartnerControls">
+  <documentManagement>
+    <_dlc_DocId xmlns="01eb4bd6-a8ff-4439-b7eb-fe0a650fbd8a">FWJASSSE55TN-275-99</_dlc_DocId>
+    <_dlc_DocIdUrl xmlns="01eb4bd6-a8ff-4439-b7eb-fe0a650fbd8a">
+      <Url>https://portal.smrey.net/areas/it/_layouts/15/DocIdRedir.aspx?ID=FWJASSSE55TN-275-99</Url>
+      <Description>FWJASSSE55TN-275-99</Description>
+    </_dlc_DocIdUrl>
+  </documentManagement>
+</p:properties>
 </file>
 
 <file path=customXml/itemProps1.xml><?xml version="1.0" encoding="utf-8"?>
-<ds:datastoreItem xmlns:ds="http://schemas.openxmlformats.org/officeDocument/2006/customXml" ds:itemID="{3BD13933-A5DB-4C1B-A3C0-3E8282377038}">
+<ds:datastoreItem xmlns:ds="http://schemas.openxmlformats.org/officeDocument/2006/customXml" ds:itemID="{16F8D2E5-07BB-47AE-B585-4E84BBEF5BCB}">
   <ds:schemaRefs>
-    <ds:schemaRef ds:uri="http://schemas.microsoft.com/office/2006/documentManagement/types"/>
-    <ds:schemaRef ds:uri="http://schemas.openxmlformats.org/package/2006/metadata/core-properties"/>
-    <ds:schemaRef ds:uri="http://purl.org/dc/dcmitype/"/>
-    <ds:schemaRef ds:uri="http://purl.org/dc/terms/"/>
-    <ds:schemaRef ds:uri="http://www.w3.org/XML/1998/namespace"/>
-    <ds:schemaRef ds:uri="http://schemas.microsoft.com/office/infopath/2007/PartnerControls"/>
-    <ds:schemaRef ds:uri="01eb4bd6-a8ff-4439-b7eb-fe0a650fbd8a"/>
-    <ds:schemaRef ds:uri="http://schemas.microsoft.com/office/2006/metadata/properties"/>
-    <ds:schemaRef ds:uri="http://purl.org/dc/elements/1.1/"/>
+    <ds:schemaRef ds:uri="http://schemas.microsoft.com/sharepoint/v3/contenttype/forms"/>
   </ds:schemaRefs>
 </ds:datastoreItem>
 </file>
 
 <file path=customXml/itemProps2.xml><?xml version="1.0" encoding="utf-8"?>
-<ds:datastoreItem xmlns:ds="http://schemas.openxmlformats.org/officeDocument/2006/customXml" ds:itemID="{48DA3225-2CAA-4367-AD19-C168E829FD1B}">
-  <ds:schemaRefs>
-    <ds:schemaRef ds:uri="http://schemas.microsoft.com/sharepoint/events"/>
-  </ds:schemaRefs>
-</ds:datastoreItem>
-</file>
-
-<file path=customXml/itemProps3.xml><?xml version="1.0" encoding="utf-8"?>
 <ds:datastoreItem xmlns:ds="http://schemas.openxmlformats.org/officeDocument/2006/customXml" ds:itemID="{E1A2E32C-5121-4080-869C-5DE7FAABA962}">
   <ds:schemaRefs>
     <ds:schemaRef ds:uri="http://schemas.microsoft.com/office/2006/metadata/contentType"/>
@@ -7742,10 +7488,26 @@
 </ds:datastoreItem>
 </file>
 
+<file path=customXml/itemProps3.xml><?xml version="1.0" encoding="utf-8"?>
+<ds:datastoreItem xmlns:ds="http://schemas.openxmlformats.org/officeDocument/2006/customXml" ds:itemID="{48DA3225-2CAA-4367-AD19-C168E829FD1B}">
+  <ds:schemaRefs>
+    <ds:schemaRef ds:uri="http://schemas.microsoft.com/sharepoint/events"/>
+  </ds:schemaRefs>
+</ds:datastoreItem>
+</file>
+
 <file path=customXml/itemProps4.xml><?xml version="1.0" encoding="utf-8"?>
-<ds:datastoreItem xmlns:ds="http://schemas.openxmlformats.org/officeDocument/2006/customXml" ds:itemID="{16F8D2E5-07BB-47AE-B585-4E84BBEF5BCB}">
+<ds:datastoreItem xmlns:ds="http://schemas.openxmlformats.org/officeDocument/2006/customXml" ds:itemID="{3BD13933-A5DB-4C1B-A3C0-3E8282377038}">
   <ds:schemaRefs>
-    <ds:schemaRef ds:uri="http://schemas.microsoft.com/sharepoint/v3/contenttype/forms"/>
+    <ds:schemaRef ds:uri="http://schemas.microsoft.com/office/2006/documentManagement/types"/>
+    <ds:schemaRef ds:uri="http://schemas.openxmlformats.org/package/2006/metadata/core-properties"/>
+    <ds:schemaRef ds:uri="http://purl.org/dc/dcmitype/"/>
+    <ds:schemaRef ds:uri="http://purl.org/dc/terms/"/>
+    <ds:schemaRef ds:uri="http://www.w3.org/XML/1998/namespace"/>
+    <ds:schemaRef ds:uri="http://schemas.microsoft.com/office/infopath/2007/PartnerControls"/>
+    <ds:schemaRef ds:uri="01eb4bd6-a8ff-4439-b7eb-fe0a650fbd8a"/>
+    <ds:schemaRef ds:uri="http://schemas.microsoft.com/office/2006/metadata/properties"/>
+    <ds:schemaRef ds:uri="http://purl.org/dc/elements/1.1/"/>
   </ds:schemaRefs>
 </ds:datastoreItem>
 </file>